--- a/Lecture3.pptx
+++ b/Lecture3.pptx
@@ -261,7 +261,7 @@
           <a:p>
             <a:fld id="{0AE34835-998C-48F3-922B-834DDD525EE4}" type="datetimeFigureOut">
               <a:rPr lang="ko-KR" altLang="en-US" smtClean="0"/>
-              <a:t>2025-09-29</a:t>
+              <a:t>2025-11-04(Tue)</a:t>
             </a:fld>
             <a:endParaRPr lang="ko-KR" altLang="en-US"/>
           </a:p>
@@ -661,7 +661,7 @@
           <a:p>
             <a:fld id="{FB30EDBD-1C2D-4C1E-B459-B60219FAB484}" type="datetimeFigureOut">
               <a:rPr lang="ko-KR" altLang="en-US" smtClean="0"/>
-              <a:t>2025-09-29</a:t>
+              <a:t>2025-11-04(Tue)</a:t>
             </a:fld>
             <a:endParaRPr lang="ko-KR" altLang="en-US"/>
           </a:p>
@@ -948,7 +948,7 @@
           <a:p>
             <a:fld id="{FB30EDBD-1C2D-4C1E-B459-B60219FAB484}" type="datetimeFigureOut">
               <a:rPr lang="ko-KR" altLang="en-US" smtClean="0"/>
-              <a:t>2025-09-29</a:t>
+              <a:t>2025-11-04(Tue)</a:t>
             </a:fld>
             <a:endParaRPr lang="ko-KR" altLang="en-US"/>
           </a:p>
@@ -1140,7 +1140,7 @@
           <a:p>
             <a:fld id="{FB30EDBD-1C2D-4C1E-B459-B60219FAB484}" type="datetimeFigureOut">
               <a:rPr lang="ko-KR" altLang="en-US" smtClean="0"/>
-              <a:t>2025-09-29</a:t>
+              <a:t>2025-11-04(Tue)</a:t>
             </a:fld>
             <a:endParaRPr lang="ko-KR" altLang="en-US"/>
           </a:p>
@@ -1401,7 +1401,7 @@
           <a:p>
             <a:fld id="{FB30EDBD-1C2D-4C1E-B459-B60219FAB484}" type="datetimeFigureOut">
               <a:rPr lang="ko-KR" altLang="en-US" smtClean="0"/>
-              <a:t>2025-09-29</a:t>
+              <a:t>2025-11-04(Tue)</a:t>
             </a:fld>
             <a:endParaRPr lang="ko-KR" altLang="en-US"/>
           </a:p>
@@ -1825,7 +1825,7 @@
           <a:p>
             <a:fld id="{FB30EDBD-1C2D-4C1E-B459-B60219FAB484}" type="datetimeFigureOut">
               <a:rPr lang="ko-KR" altLang="en-US" smtClean="0"/>
-              <a:t>2025-09-29</a:t>
+              <a:t>2025-11-04(Tue)</a:t>
             </a:fld>
             <a:endParaRPr lang="ko-KR" altLang="en-US"/>
           </a:p>
@@ -2371,7 +2371,7 @@
           <a:p>
             <a:fld id="{FB30EDBD-1C2D-4C1E-B459-B60219FAB484}" type="datetimeFigureOut">
               <a:rPr lang="ko-KR" altLang="en-US" smtClean="0"/>
-              <a:t>2025-09-29</a:t>
+              <a:t>2025-11-04(Tue)</a:t>
             </a:fld>
             <a:endParaRPr lang="ko-KR" altLang="en-US"/>
           </a:p>
@@ -3211,7 +3211,7 @@
           <a:p>
             <a:fld id="{FB30EDBD-1C2D-4C1E-B459-B60219FAB484}" type="datetimeFigureOut">
               <a:rPr lang="ko-KR" altLang="en-US" smtClean="0"/>
-              <a:t>2025-09-29</a:t>
+              <a:t>2025-11-04(Tue)</a:t>
             </a:fld>
             <a:endParaRPr lang="ko-KR" altLang="en-US"/>
           </a:p>
@@ -3381,7 +3381,7 @@
           <a:p>
             <a:fld id="{FB30EDBD-1C2D-4C1E-B459-B60219FAB484}" type="datetimeFigureOut">
               <a:rPr lang="ko-KR" altLang="en-US" smtClean="0"/>
-              <a:t>2025-09-29</a:t>
+              <a:t>2025-11-04(Tue)</a:t>
             </a:fld>
             <a:endParaRPr lang="ko-KR" altLang="en-US"/>
           </a:p>
@@ -3565,7 +3565,7 @@
           <a:p>
             <a:fld id="{FB30EDBD-1C2D-4C1E-B459-B60219FAB484}" type="datetimeFigureOut">
               <a:rPr lang="ko-KR" altLang="en-US" smtClean="0"/>
-              <a:t>2025-09-29</a:t>
+              <a:t>2025-11-04(Tue)</a:t>
             </a:fld>
             <a:endParaRPr lang="ko-KR" altLang="en-US"/>
           </a:p>
@@ -3735,7 +3735,7 @@
           <a:p>
             <a:fld id="{FB30EDBD-1C2D-4C1E-B459-B60219FAB484}" type="datetimeFigureOut">
               <a:rPr lang="ko-KR" altLang="en-US" smtClean="0"/>
-              <a:t>2025-09-29</a:t>
+              <a:t>2025-11-04(Tue)</a:t>
             </a:fld>
             <a:endParaRPr lang="ko-KR" altLang="en-US"/>
           </a:p>
@@ -3983,7 +3983,7 @@
           <a:p>
             <a:fld id="{FB30EDBD-1C2D-4C1E-B459-B60219FAB484}" type="datetimeFigureOut">
               <a:rPr lang="ko-KR" altLang="en-US" smtClean="0"/>
-              <a:t>2025-09-29</a:t>
+              <a:t>2025-11-04(Tue)</a:t>
             </a:fld>
             <a:endParaRPr lang="ko-KR" altLang="en-US"/>
           </a:p>
@@ -4220,7 +4220,7 @@
           <a:p>
             <a:fld id="{FB30EDBD-1C2D-4C1E-B459-B60219FAB484}" type="datetimeFigureOut">
               <a:rPr lang="ko-KR" altLang="en-US" smtClean="0"/>
-              <a:t>2025-09-29</a:t>
+              <a:t>2025-11-04(Tue)</a:t>
             </a:fld>
             <a:endParaRPr lang="ko-KR" altLang="en-US"/>
           </a:p>
@@ -4593,7 +4593,7 @@
           <a:p>
             <a:fld id="{FB30EDBD-1C2D-4C1E-B459-B60219FAB484}" type="datetimeFigureOut">
               <a:rPr lang="ko-KR" altLang="en-US" smtClean="0"/>
-              <a:t>2025-09-29</a:t>
+              <a:t>2025-11-04(Tue)</a:t>
             </a:fld>
             <a:endParaRPr lang="ko-KR" altLang="en-US"/>
           </a:p>
@@ -4711,7 +4711,7 @@
           <a:p>
             <a:fld id="{FB30EDBD-1C2D-4C1E-B459-B60219FAB484}" type="datetimeFigureOut">
               <a:rPr lang="ko-KR" altLang="en-US" smtClean="0"/>
-              <a:t>2025-09-29</a:t>
+              <a:t>2025-11-04(Tue)</a:t>
             </a:fld>
             <a:endParaRPr lang="ko-KR" altLang="en-US"/>
           </a:p>
@@ -4806,7 +4806,7 @@
           <a:p>
             <a:fld id="{FB30EDBD-1C2D-4C1E-B459-B60219FAB484}" type="datetimeFigureOut">
               <a:rPr lang="ko-KR" altLang="en-US" smtClean="0"/>
-              <a:t>2025-09-29</a:t>
+              <a:t>2025-11-04(Tue)</a:t>
             </a:fld>
             <a:endParaRPr lang="ko-KR" altLang="en-US"/>
           </a:p>
@@ -5057,7 +5057,7 @@
           <a:p>
             <a:fld id="{FB30EDBD-1C2D-4C1E-B459-B60219FAB484}" type="datetimeFigureOut">
               <a:rPr lang="ko-KR" altLang="en-US" smtClean="0"/>
-              <a:t>2025-09-29</a:t>
+              <a:t>2025-11-04(Tue)</a:t>
             </a:fld>
             <a:endParaRPr lang="ko-KR" altLang="en-US"/>
           </a:p>
@@ -5344,7 +5344,7 @@
           <a:p>
             <a:fld id="{FB30EDBD-1C2D-4C1E-B459-B60219FAB484}" type="datetimeFigureOut">
               <a:rPr lang="ko-KR" altLang="en-US" smtClean="0"/>
-              <a:t>2025-09-29</a:t>
+              <a:t>2025-11-04(Tue)</a:t>
             </a:fld>
             <a:endParaRPr lang="ko-KR" altLang="en-US"/>
           </a:p>
@@ -5557,7 +5557,7 @@
           <a:p>
             <a:fld id="{FB30EDBD-1C2D-4C1E-B459-B60219FAB484}" type="datetimeFigureOut">
               <a:rPr lang="ko-KR" altLang="en-US" smtClean="0"/>
-              <a:t>2025-09-29</a:t>
+              <a:t>2025-11-04(Tue)</a:t>
             </a:fld>
             <a:endParaRPr lang="ko-KR" altLang="en-US"/>
           </a:p>
